--- a/Storyboarding/NewLectures/10_Boarding_for_Games.pptx
+++ b/Storyboarding/NewLectures/10_Boarding_for_Games.pptx
@@ -536,7 +536,7 @@
           <a:lstStyle/>
           <a:p>
             <a:r>
-              <a:t>This class is useful to you whether or not you ever work on a game, and I want to say why up front, because half the room has already decided this one isn't for them.</a:t>
+              <a:t>This class is useful to you whether or not you ever work on a game, and it's worth saying why up front: half the room has already decided this one isn't for them.</a:t>
             </a:r>
           </a:p>
           <a:p/>
@@ -630,7 +630,7 @@
           <a:p/>
           <a:p>
             <a:r>
-              <a:t>Colour, when it's used as a system rather than decoration. Motion in the periphery, which turns heads involuntarily. Audio, which is criminally underrated and can turn a player around with no visual cue at all.</a:t>
+              <a:t>Color, when it's used as a system rather than decoration. Motion in the periphery, which turns heads involuntarily. Audio, which is criminally underrated and can turn a player around with no visual cue at all.</a:t>
             </a:r>
           </a:p>
           <a:p/>
@@ -1058,7 +1058,7 @@
           <a:lstStyle/>
           <a:p>
             <a:r>
-              <a:t>The transition from gameplay into a cutscene and back out is the most scrutinised cut in the entire medium, because it's where the two halves of the thing are joined.</a:t>
+              <a:t>The transition from gameplay into a cutscene and back out is the most scrutinized cut in the entire medium, because it's where the two halves of the thing are joined.</a:t>
             </a:r>
           </a:p>
           <a:p/>
@@ -1252,7 +1252,7 @@
           <a:p/>
           <a:p>
             <a:r>
-              <a:t>It is genuinely a different document from a film board, and it is the first thing that looks alien to somebody arriving from film. It's also mostly just a floor plan for time instead of space.</a:t>
+              <a:t>It is a different document from a film board, and it is the first thing that looks alien to somebody arriving from film. It's also mostly just a floor plan for time instead of space.</a:t>
             </a:r>
           </a:p>
         </p:txBody>
@@ -1516,7 +1516,7 @@
           <a:p/>
           <a:p>
             <a:r>
-              <a:t>I lead with this because students arrive at this session expecting to be told that everything is different, and then they discount the eleven classes behind them. Don't. The grammar holds.</a:t>
+              <a:t>Lead with this, because students arrive at this session expecting to be told that everything is different, and then they discount the eleven classes behind them. Don't. The grammar holds.</a:t>
             </a:r>
           </a:p>
           <a:p/>
@@ -1786,7 +1786,7 @@
           <a:p/>
           <a:p>
             <a:r>
-              <a:t>Which is the same test I gave you in week one with a black marker. Same test, higher stakes, and now somebody pays for it.</a:t>
+              <a:t>Which is the same test from week one, with a black marker. Same test, higher stakes, and now somebody pays for it.</a:t>
             </a:r>
           </a:p>
         </p:txBody>
@@ -2202,13 +2202,13 @@
           <a:lstStyle/>
           <a:p>
             <a:r>
-              <a:t>A few neighbours worth knowing exist.</a:t>
+              <a:t>A few neighbors worth knowing exist.</a:t>
             </a:r>
           </a:p>
           <a:p/>
           <a:p>
             <a:r>
-              <a:t>VR and 360, where there is no frame at all and you are staging a room and hoping. AR, which composites onto a world you didn't build. Immersive theatre, which solved a lot of these problems decades before games did. Interactive film.</a:t>
+              <a:t>VR and 360, where there is no frame at all and you are staging a room and hoping. AR, which composites onto a world you didn't build. Immersive theater, which solved a lot of these problems decades before games did. Interactive film.</a:t>
             </a:r>
           </a:p>
           <a:p/>
@@ -2384,7 +2384,7 @@
           <a:lstStyle/>
           <a:p>
             <a:r>
-              <a:t>[ADD IMAGE: cinematic stills from God of War 2018, The Last of Us, Arcane, Uncharted 4. Four across, unlabelled.]</a:t>
+              <a:t>[ADD IMAGE: cinematic stills from God of War 2018, The Last of Us, Arcane, Uncharted 4. Four across, unlabeled.]</a:t>
             </a:r>
           </a:p>
           <a:p/>
@@ -2660,7 +2660,7 @@
           <a:lstStyle/>
           <a:p>
             <a:r>
-              <a:t>Three situations, and they are genuinely different jobs.</a:t>
+              <a:t>Three situations, and they are different jobs.</a:t>
             </a:r>
           </a:p>
           <a:p/>
@@ -2766,7 +2766,7 @@
           <a:p/>
           <a:p>
             <a:r>
-              <a:t>Fixed cameras, the classic Resident Evil approach: actually the most film-like, because the designer chose the angle.</a:t>
+              <a:t>Fixed cameras, the classic Resident Evil approach: the most film-like, because the designer chose the angle.</a:t>
             </a:r>
           </a:p>
           <a:p/>
@@ -2954,7 +2954,7 @@
           <a:p/>
           <a:p>
             <a:r>
-              <a:t>Fifth appearance this term. I keep telling you this course is six tools wearing different hats, and this is the one that has turned up in every single unit.</a:t>
+              <a:t>Fifth appearance this term. This course is six tools wearing different hats, and this is the one that has turned up in every single unit.</a:t>
             </a:r>
           </a:p>
         </p:txBody>
@@ -8694,7 +8694,7 @@
           <a:p>
             <a:pPr/>
             <a:r>
-              <a:t>Light. Colour. Motion.</a:t>
+              <a:t>Light. Color. Motion.</a:t>
             </a:r>
           </a:p>
           <a:p>
@@ -9736,7 +9736,7 @@
           <a:p>
             <a:pPr/>
             <a:r>
-              <a:t>Colourblind-safe signalling.</a:t>
+              <a:t>Colorblind-safe signaling.</a:t>
             </a:r>
           </a:p>
           <a:p>
@@ -10040,7 +10040,7 @@
           <a:p>
             <a:pPr/>
             <a:r>
-              <a:t>Immersive theatre. Interactive film.</a:t>
+              <a:t>Immersive theater. Interactive film.</a:t>
             </a:r>
           </a:p>
           <a:p>
